--- a/Introduction to Discrete Mathematics.pptx
+++ b/Introduction to Discrete Mathematics.pptx
@@ -17863,49 +17863,6 @@
                 <a:latin typeface="Segoe UI"/>
               </a:rPr>
               <a:t>Proof techniques</a:t>
-            </a:r>
-          </a:p>
-        </p:txBody>
-      </p:sp>
-      <p:sp>
-        <p:nvSpPr>
-          <p:cNvPr id="36" name="TextBox 35"/>
-          <p:cNvSpPr txBox="1"/>
-          <p:nvPr/>
-        </p:nvSpPr>
-        <p:spPr>
-          <a:xfrm>
-            <a:off x="658368" y="6071616"/>
-            <a:ext cx="10874959" cy="274320"/>
-          </a:xfrm>
-          <a:prstGeom prst="rect">
-            <a:avLst/>
-          </a:prstGeom>
-          <a:noFill/>
-        </p:spPr>
-        <p:txBody>
-          <a:bodyPr wrap="square" lIns="0" tIns="0" rIns="0" bIns="0" anchor="t"/>
-          <a:lstStyle/>
-          <a:p>
-            <a:pPr algn="l">
-              <a:lnSpc>
-                <a:spcPct val="100000"/>
-              </a:lnSpc>
-              <a:spcBef>
-                <a:spcPts val="0"/>
-              </a:spcBef>
-              <a:spcAft>
-                <a:spcPts val="0"/>
-              </a:spcAft>
-            </a:pPr>
-            <a:r>
-              <a:rPr sz="1350" b="0" i="0">
-                <a:solidFill>
-                  <a:srgbClr val="5F7388"/>
-                </a:solidFill>
-                <a:latin typeface="Segoe UI"/>
-              </a:rPr>
-              <a:t>Not one of these can be answered by calculus. Every one of them is on our syllabus.</a:t>
             </a:r>
           </a:p>
         </p:txBody>

--- a/Introduction to Discrete Mathematics.pptx
+++ b/Introduction to Discrete Mathematics.pptx
@@ -314,7 +314,7 @@
           <a:p>
             <a:fld id="{5BCAD085-E8A6-8845-BD4E-CB4CCA059FC4}" type="datetimeFigureOut">
               <a:rPr lang="en-US" smtClean="0"/>
-              <a:t>10/26/2026</a:t>
+              <a:t>10/27/2026</a:t>
             </a:fld>
             <a:endParaRPr lang="en-US"/>
           </a:p>
@@ -482,7 +482,7 @@
           <a:p>
             <a:fld id="{5BCAD085-E8A6-8845-BD4E-CB4CCA059FC4}" type="datetimeFigureOut">
               <a:rPr lang="en-US" smtClean="0"/>
-              <a:t>10/26/2026</a:t>
+              <a:t>10/27/2026</a:t>
             </a:fld>
             <a:endParaRPr lang="en-US"/>
           </a:p>
@@ -660,7 +660,7 @@
           <a:p>
             <a:fld id="{5BCAD085-E8A6-8845-BD4E-CB4CCA059FC4}" type="datetimeFigureOut">
               <a:rPr lang="en-US" smtClean="0"/>
-              <a:t>10/26/2026</a:t>
+              <a:t>10/27/2026</a:t>
             </a:fld>
             <a:endParaRPr lang="en-US"/>
           </a:p>
@@ -828,7 +828,7 @@
           <a:p>
             <a:fld id="{5BCAD085-E8A6-8845-BD4E-CB4CCA059FC4}" type="datetimeFigureOut">
               <a:rPr lang="en-US" smtClean="0"/>
-              <a:t>10/26/2026</a:t>
+              <a:t>10/27/2026</a:t>
             </a:fld>
             <a:endParaRPr lang="en-US"/>
           </a:p>
@@ -1073,7 +1073,7 @@
           <a:p>
             <a:fld id="{5BCAD085-E8A6-8845-BD4E-CB4CCA059FC4}" type="datetimeFigureOut">
               <a:rPr lang="en-US" smtClean="0"/>
-              <a:t>10/26/2026</a:t>
+              <a:t>10/27/2026</a:t>
             </a:fld>
             <a:endParaRPr lang="en-US"/>
           </a:p>
@@ -1358,7 +1358,7 @@
           <a:p>
             <a:fld id="{5BCAD085-E8A6-8845-BD4E-CB4CCA059FC4}" type="datetimeFigureOut">
               <a:rPr lang="en-US" smtClean="0"/>
-              <a:t>10/26/2026</a:t>
+              <a:t>10/27/2026</a:t>
             </a:fld>
             <a:endParaRPr lang="en-US"/>
           </a:p>
@@ -1777,7 +1777,7 @@
           <a:p>
             <a:fld id="{5BCAD085-E8A6-8845-BD4E-CB4CCA059FC4}" type="datetimeFigureOut">
               <a:rPr lang="en-US" smtClean="0"/>
-              <a:t>10/26/2026</a:t>
+              <a:t>10/27/2026</a:t>
             </a:fld>
             <a:endParaRPr lang="en-US"/>
           </a:p>
@@ -1894,7 +1894,7 @@
           <a:p>
             <a:fld id="{5BCAD085-E8A6-8845-BD4E-CB4CCA059FC4}" type="datetimeFigureOut">
               <a:rPr lang="en-US" smtClean="0"/>
-              <a:t>10/26/2026</a:t>
+              <a:t>10/27/2026</a:t>
             </a:fld>
             <a:endParaRPr lang="en-US"/>
           </a:p>
@@ -1989,7 +1989,7 @@
           <a:p>
             <a:fld id="{5BCAD085-E8A6-8845-BD4E-CB4CCA059FC4}" type="datetimeFigureOut">
               <a:rPr lang="en-US" smtClean="0"/>
-              <a:t>10/26/2026</a:t>
+              <a:t>10/27/2026</a:t>
             </a:fld>
             <a:endParaRPr lang="en-US"/>
           </a:p>
@@ -2264,7 +2264,7 @@
           <a:p>
             <a:fld id="{5BCAD085-E8A6-8845-BD4E-CB4CCA059FC4}" type="datetimeFigureOut">
               <a:rPr lang="en-US" smtClean="0"/>
-              <a:t>10/26/2026</a:t>
+              <a:t>10/27/2026</a:t>
             </a:fld>
             <a:endParaRPr lang="en-US"/>
           </a:p>
@@ -2516,7 +2516,7 @@
           <a:p>
             <a:fld id="{5BCAD085-E8A6-8845-BD4E-CB4CCA059FC4}" type="datetimeFigureOut">
               <a:rPr lang="en-US" smtClean="0"/>
-              <a:t>10/26/2026</a:t>
+              <a:t>10/27/2026</a:t>
             </a:fld>
             <a:endParaRPr lang="en-US"/>
           </a:p>
@@ -2727,7 +2727,7 @@
           <a:p>
             <a:fld id="{5BCAD085-E8A6-8845-BD4E-CB4CCA059FC4}" type="datetimeFigureOut">
               <a:rPr lang="en-US" smtClean="0"/>
-              <a:t>10/26/2026</a:t>
+              <a:t>10/27/2026</a:t>
             </a:fld>
             <a:endParaRPr lang="en-US"/>
           </a:p>
@@ -10766,14 +10766,32 @@
               </a:spcAft>
             </a:pPr>
             <a:r>
-              <a:rPr sz="1450" b="1" i="0">
+              <a:rPr sz="1450" b="1" i="0" dirty="0">
                 <a:solidFill>
                   <a:srgbClr val="102A43"/>
                 </a:solidFill>
                 <a:latin typeface="Segoe UI"/>
               </a:rPr>
               <a:t>Intro to
-Computing Systems</a:t>
+Comput</a:t>
+            </a:r>
+            <a:r>
+              <a:rPr lang="en-US" sz="1450" b="1" i="0" dirty="0">
+                <a:solidFill>
+                  <a:srgbClr val="102A43"/>
+                </a:solidFill>
+                <a:latin typeface="Segoe UI"/>
+              </a:rPr>
+              <a:t>er</a:t>
+            </a:r>
+            <a:r>
+              <a:rPr sz="1450" b="1" i="0" dirty="0">
+                <a:solidFill>
+                  <a:srgbClr val="102A43"/>
+                </a:solidFill>
+                <a:latin typeface="Segoe UI"/>
+              </a:rPr>
+              <a:t> Systems</a:t>
             </a:r>
           </a:p>
         </p:txBody>
